--- a/RUVVAE_slides.pptx
+++ b/RUVVAE_slides.pptx
@@ -4405,7 +4405,7 @@
                 <a:spcPts val="0"/>
               </a:spcBef>
               <a:spcAft>
-                <a:spcPts val="2600"/>
+                <a:spcPts val="2000"/>
               </a:spcAft>
             </a:pPr>
             <a:r>
@@ -4440,7 +4440,7 @@
                 <a:spcPts val="0"/>
               </a:spcBef>
               <a:spcAft>
-                <a:spcPts val="1200"/>
+                <a:spcPts val="1000"/>
               </a:spcAft>
             </a:pPr>
             <a:r>
@@ -4475,11 +4475,11 @@
                 <a:spcPts val="0"/>
               </a:spcBef>
               <a:spcAft>
-                <a:spcPts val="900"/>
-              </a:spcAft>
-            </a:pPr>
-            <a:r>
-              <a:rPr sz="1250" b="0">
+                <a:spcPts val="600"/>
+              </a:spcAft>
+            </a:pPr>
+            <a:r>
+              <a:rPr sz="1200" b="0">
                 <a:solidFill>
                   <a:srgbClr val="1A1A1A"/>
                 </a:solidFill>
@@ -4499,11 +4499,11 @@
                 <a:spcPts val="0"/>
               </a:spcBef>
               <a:spcAft>
-                <a:spcPts val="900"/>
-              </a:spcAft>
-            </a:pPr>
-            <a:r>
-              <a:rPr sz="1250" b="0">
+                <a:spcPts val="600"/>
+              </a:spcAft>
+            </a:pPr>
+            <a:r>
+              <a:rPr sz="1200" b="0">
                 <a:solidFill>
                   <a:srgbClr val="1A1A1A"/>
                 </a:solidFill>
@@ -4527,7 +4527,7 @@
               </a:spcAft>
             </a:pPr>
             <a:r>
-              <a:rPr sz="1250" b="0">
+              <a:rPr sz="1200" b="0">
                 <a:solidFill>
                   <a:srgbClr val="1A1A1A"/>
                 </a:solidFill>
@@ -4556,8 +4556,8 @@
         </p:blipFill>
         <p:spPr>
           <a:xfrm>
-            <a:off x="715459" y="4956048"/>
-            <a:ext cx="1988937" cy="1554480"/>
+            <a:off x="6676758" y="4846320"/>
+            <a:ext cx="1871940" cy="1463040"/>
           </a:xfrm>
           <a:prstGeom prst="rect">
             <a:avLst/>
@@ -4572,8 +4572,8 @@
         </p:nvSpPr>
         <p:spPr>
           <a:xfrm>
-            <a:off x="3017520" y="5138928"/>
-            <a:ext cx="3078464" cy="1280160"/>
+            <a:off x="8842597" y="5010912"/>
+            <a:ext cx="2782444" cy="1280160"/>
           </a:xfrm>
           <a:prstGeom prst="rect">
             <a:avLst/>
